--- a/Achievement, Target, & Dream.pptx
+++ b/Achievement, Target, & Dream.pptx
@@ -5,20 +5,19 @@
     <p:sldMasterId id="2147483648" r:id="rId4"/>
   </p:sldMasterIdLst>
   <p:notesMasterIdLst>
-    <p:notesMasterId r:id="rId13"/>
+    <p:notesMasterId r:id="rId12"/>
   </p:notesMasterIdLst>
   <p:handoutMasterIdLst>
-    <p:handoutMasterId r:id="rId14"/>
+    <p:handoutMasterId r:id="rId13"/>
   </p:handoutMasterIdLst>
   <p:sldIdLst>
     <p:sldId id="415" r:id="rId5"/>
-    <p:sldId id="470" r:id="rId6"/>
-    <p:sldId id="472" r:id="rId7"/>
-    <p:sldId id="473" r:id="rId8"/>
-    <p:sldId id="475" r:id="rId9"/>
-    <p:sldId id="474" r:id="rId10"/>
-    <p:sldId id="471" r:id="rId11"/>
-    <p:sldId id="452" r:id="rId12"/>
+    <p:sldId id="472" r:id="rId6"/>
+    <p:sldId id="473" r:id="rId7"/>
+    <p:sldId id="475" r:id="rId8"/>
+    <p:sldId id="474" r:id="rId9"/>
+    <p:sldId id="471" r:id="rId10"/>
+    <p:sldId id="452" r:id="rId11"/>
   </p:sldIdLst>
   <p:sldSz cx="12192000" cy="6858000"/>
   <p:notesSz cx="6858000" cy="9144000"/>
@@ -233,7 +232,7 @@
           <a:p>
             <a:fld id="{2F14FD17-B27E-45F5-83E5-6BB059B3DE89}" type="datetimeFigureOut">
               <a:rPr lang="en-US" sz="800" smtClean="0"/>
-              <a:t>4/27/2026</a:t>
+              <a:t>4/29/2026</a:t>
             </a:fld>
             <a:endParaRPr lang="en-US" sz="800"/>
           </a:p>
@@ -462,7 +461,7 @@
             <a:fld id="{E192053C-4872-41CE-A1E7-62A4E796B437}" type="datetimeFigureOut">
               <a:rPr lang="en-US" smtClean="0"/>
               <a:pPr/>
-              <a:t>4/27/2026</a:t>
+              <a:t>4/29/2026</a:t>
             </a:fld>
             <a:endParaRPr lang="en-US"/>
           </a:p>
@@ -15481,7 +15480,7 @@
             <a:fld id="{7DD57FDA-C3D7-4863-B8D2-E7422D6B54FE}" type="datetime1">
               <a:rPr lang="en-US" smtClean="0"/>
               <a:pPr/>
-              <a:t>4/27/2026</a:t>
+              <a:t>4/29/2026</a:t>
             </a:fld>
             <a:endParaRPr lang="en-US" dirty="0"/>
           </a:p>
@@ -15732,7 +15731,7 @@
             <a:fld id="{7DD57FDA-C3D7-4863-B8D2-E7422D6B54FE}" type="datetime1">
               <a:rPr lang="en-US" smtClean="0"/>
               <a:pPr/>
-              <a:t>4/27/2026</a:t>
+              <a:t>4/29/2026</a:t>
             </a:fld>
             <a:endParaRPr lang="en-US" dirty="0"/>
           </a:p>
@@ -15975,7 +15974,7 @@
             <a:fld id="{7DD57FDA-C3D7-4863-B8D2-E7422D6B54FE}" type="datetime1">
               <a:rPr lang="en-US" smtClean="0"/>
               <a:pPr/>
-              <a:t>4/27/2026</a:t>
+              <a:t>4/29/2026</a:t>
             </a:fld>
             <a:endParaRPr lang="en-US" dirty="0"/>
           </a:p>
@@ -16504,7 +16503,7 @@
             <a:fld id="{7DD57FDA-C3D7-4863-B8D2-E7422D6B54FE}" type="datetime1">
               <a:rPr lang="en-US" smtClean="0"/>
               <a:pPr/>
-              <a:t>4/27/2026</a:t>
+              <a:t>4/29/2026</a:t>
             </a:fld>
             <a:endParaRPr lang="en-US" dirty="0"/>
           </a:p>
@@ -18965,29 +18964,43 @@
           <a:chExt cx="0" cy="0"/>
         </a:xfrm>
       </p:grpSpPr>
-      <p:sp>
-        <p:nvSpPr>
-          <p:cNvPr id="47" name="Picture Placeholder 1">
-            <a:extLst>
-              <a:ext uri="{FF2B5EF4-FFF2-40B4-BE49-F238E27FC236}">
-                <a16:creationId xmlns:a16="http://schemas.microsoft.com/office/drawing/2014/main" id="{D73DD3BE-9188-17BD-0027-49BDA91985EA}"/>
-              </a:ext>
-            </a:extLst>
-          </p:cNvPr>
-          <p:cNvSpPr>
-            <a:spLocks noGrp="1"/>
-          </p:cNvSpPr>
+      <p:pic>
+        <p:nvPicPr>
+          <p:cNvPr id="7" name="Picture Placeholder 6" descr="A computer keyboard with glowing lights&#10;&#10;Description automatically generated">
+            <a:extLst>
+              <a:ext uri="{FF2B5EF4-FFF2-40B4-BE49-F238E27FC236}">
+                <a16:creationId xmlns:a16="http://schemas.microsoft.com/office/drawing/2014/main" id="{22E3B780-1162-4DF0-AE8F-35994AE7A9A9}"/>
+              </a:ext>
+            </a:extLst>
+          </p:cNvPr>
+          <p:cNvPicPr>
+            <a:picLocks noGrp="1" noChangeAspect="1"/>
+          </p:cNvPicPr>
           <p:nvPr>
             <p:ph type="pic" sz="quarter" idx="21"/>
           </p:nvPr>
-        </p:nvSpPr>
-        <p:spPr>
-          <a:xfrm>
-            <a:off x="1125867" y="13448"/>
-            <a:ext cx="11114901" cy="6857999"/>
-          </a:xfrm>
-        </p:spPr>
-      </p:sp>
+        </p:nvPicPr>
+        <p:blipFill>
+          <a:blip r:embed="rId2">
+            <a:alphaModFix amt="20000"/>
+            <a:extLst>
+              <a:ext uri="{28A0092B-C50C-407E-A947-70E740481C1C}">
+                <a14:useLocalDpi xmlns:a14="http://schemas.microsoft.com/office/drawing/2010/main" val="0"/>
+              </a:ext>
+            </a:extLst>
+          </a:blip>
+          <a:srcRect l="4583" r="4583"/>
+          <a:stretch>
+            <a:fillRect/>
+          </a:stretch>
+        </p:blipFill>
+        <p:spPr>
+          <a:xfrm>
+            <a:off x="1089771" y="0"/>
+            <a:ext cx="11115676" cy="6858000"/>
+          </a:xfrm>
+        </p:spPr>
+      </p:pic>
       <p:sp>
         <p:nvSpPr>
           <p:cNvPr id="48" name="Title 2">
@@ -19023,16 +19036,15 @@
             </a:br>
             <a:r>
               <a:rPr lang="en-US" dirty="0"/>
-              <a:t>T131 Target</a:t>
+              <a:t>T131 Target Goal</a:t>
             </a:r>
             <a:br>
-              <a:rPr lang="en-US"/>
+              <a:rPr lang="en-US" dirty="0"/>
             </a:br>
             <a:r>
-              <a:rPr lang="en-US"/>
+              <a:rPr lang="en-US" dirty="0"/>
               <a:t>Dream</a:t>
             </a:r>
-            <a:endParaRPr lang="en-US" dirty="0"/>
           </a:p>
         </p:txBody>
       </p:sp>
@@ -19458,6 +19470,408 @@
 </file>
 
 <file path=ppt/slides/slide2.xml><?xml version="1.0" encoding="utf-8"?>
+<p:sld xmlns:a="http://schemas.openxmlformats.org/drawingml/2006/main" xmlns:r="http://schemas.openxmlformats.org/officeDocument/2006/relationships" xmlns:p="http://schemas.openxmlformats.org/presentationml/2006/main">
+  <p:cSld>
+    <p:spTree>
+      <p:nvGrpSpPr>
+        <p:cNvPr id="1" name="">
+          <a:extLst>
+            <a:ext uri="{FF2B5EF4-FFF2-40B4-BE49-F238E27FC236}">
+              <a16:creationId xmlns:a16="http://schemas.microsoft.com/office/drawing/2014/main" id="{B4454F6A-E846-A0EF-455C-8C8624F6B8F6}"/>
+            </a:ext>
+          </a:extLst>
+        </p:cNvPr>
+        <p:cNvGrpSpPr/>
+        <p:nvPr/>
+      </p:nvGrpSpPr>
+      <p:grpSpPr>
+        <a:xfrm>
+          <a:off x="0" y="0"/>
+          <a:ext cx="0" cy="0"/>
+          <a:chOff x="0" y="0"/>
+          <a:chExt cx="0" cy="0"/>
+        </a:xfrm>
+      </p:grpSpPr>
+      <p:sp>
+        <p:nvSpPr>
+          <p:cNvPr id="2" name="Footer Placeholder 1">
+            <a:extLst>
+              <a:ext uri="{FF2B5EF4-FFF2-40B4-BE49-F238E27FC236}">
+                <a16:creationId xmlns:a16="http://schemas.microsoft.com/office/drawing/2014/main" id="{B92D1BA2-9B6E-80A0-3C75-D9A609C206D8}"/>
+              </a:ext>
+            </a:extLst>
+          </p:cNvPr>
+          <p:cNvSpPr>
+            <a:spLocks noGrp="1"/>
+          </p:cNvSpPr>
+          <p:nvPr>
+            <p:ph type="ftr" sz="quarter" idx="16"/>
+          </p:nvPr>
+        </p:nvSpPr>
+        <p:spPr/>
+        <p:txBody>
+          <a:bodyPr/>
+          <a:lstStyle/>
+          <a:p>
+            <a:r>
+              <a:rPr lang="en-US"/>
+              <a:t>©︎ TDK Corporation 2025 | Department | Document title | Confidential</a:t>
+            </a:r>
+            <a:endParaRPr lang="en-US" dirty="0"/>
+          </a:p>
+        </p:txBody>
+      </p:sp>
+      <p:sp>
+        <p:nvSpPr>
+          <p:cNvPr id="3" name="Slide Number Placeholder 2">
+            <a:extLst>
+              <a:ext uri="{FF2B5EF4-FFF2-40B4-BE49-F238E27FC236}">
+                <a16:creationId xmlns:a16="http://schemas.microsoft.com/office/drawing/2014/main" id="{58BED9AA-04D9-9FAF-4481-7B22819C5872}"/>
+              </a:ext>
+            </a:extLst>
+          </p:cNvPr>
+          <p:cNvSpPr>
+            <a:spLocks noGrp="1"/>
+          </p:cNvSpPr>
+          <p:nvPr>
+            <p:ph type="sldNum" sz="quarter" idx="17"/>
+          </p:nvPr>
+        </p:nvSpPr>
+        <p:spPr/>
+        <p:txBody>
+          <a:bodyPr/>
+          <a:lstStyle/>
+          <a:p>
+            <a:fld id="{91DAB662-2DEF-4FCA-85D7-1FA44B0FCDE8}" type="slidenum">
+              <a:rPr lang="en-US" smtClean="0"/>
+              <a:pPr/>
+              <a:t>2</a:t>
+            </a:fld>
+            <a:endParaRPr lang="en-US" dirty="0"/>
+          </a:p>
+        </p:txBody>
+      </p:sp>
+      <p:sp>
+        <p:nvSpPr>
+          <p:cNvPr id="5" name="テキスト プレースホルダー 4">
+            <a:extLst>
+              <a:ext uri="{FF2B5EF4-FFF2-40B4-BE49-F238E27FC236}">
+                <a16:creationId xmlns:a16="http://schemas.microsoft.com/office/drawing/2014/main" id="{ED5DAD44-863E-8F86-F5EC-CB1F4FDD4312}"/>
+              </a:ext>
+            </a:extLst>
+          </p:cNvPr>
+          <p:cNvSpPr>
+            <a:spLocks noGrp="1"/>
+          </p:cNvSpPr>
+          <p:nvPr>
+            <p:ph type="body" sz="quarter" idx="14"/>
+          </p:nvPr>
+        </p:nvSpPr>
+        <p:spPr/>
+        <p:txBody>
+          <a:bodyPr/>
+          <a:lstStyle/>
+          <a:p>
+            <a:endParaRPr lang="en-US"/>
+          </a:p>
+        </p:txBody>
+      </p:sp>
+      <p:cxnSp>
+        <p:nvCxnSpPr>
+          <p:cNvPr id="32" name="直線コネクタ 31">
+            <a:extLst>
+              <a:ext uri="{FF2B5EF4-FFF2-40B4-BE49-F238E27FC236}">
+                <a16:creationId xmlns:a16="http://schemas.microsoft.com/office/drawing/2014/main" id="{0CA045CA-A667-9FD5-E4FB-F0E0D9F310FA}"/>
+              </a:ext>
+            </a:extLst>
+          </p:cNvPr>
+          <p:cNvCxnSpPr>
+            <a:cxnSpLocks/>
+          </p:cNvCxnSpPr>
+          <p:nvPr/>
+        </p:nvCxnSpPr>
+        <p:spPr>
+          <a:xfrm>
+            <a:off x="15313179" y="1333302"/>
+            <a:ext cx="3407439" cy="0"/>
+          </a:xfrm>
+          <a:prstGeom prst="line">
+            <a:avLst/>
+          </a:prstGeom>
+          <a:ln>
+            <a:solidFill>
+              <a:schemeClr val="tx1"/>
+            </a:solidFill>
+          </a:ln>
+        </p:spPr>
+        <p:style>
+          <a:lnRef idx="2">
+            <a:schemeClr val="accent1"/>
+          </a:lnRef>
+          <a:fillRef idx="0">
+            <a:schemeClr val="accent1"/>
+          </a:fillRef>
+          <a:effectRef idx="1">
+            <a:schemeClr val="accent1"/>
+          </a:effectRef>
+          <a:fontRef idx="minor">
+            <a:schemeClr val="tx1"/>
+          </a:fontRef>
+        </p:style>
+      </p:cxnSp>
+      <p:cxnSp>
+        <p:nvCxnSpPr>
+          <p:cNvPr id="33" name="直線コネクタ 32">
+            <a:extLst>
+              <a:ext uri="{FF2B5EF4-FFF2-40B4-BE49-F238E27FC236}">
+                <a16:creationId xmlns:a16="http://schemas.microsoft.com/office/drawing/2014/main" id="{2B857F82-99A2-C045-9C3B-846195A5BDC7}"/>
+              </a:ext>
+            </a:extLst>
+          </p:cNvPr>
+          <p:cNvCxnSpPr>
+            <a:cxnSpLocks/>
+          </p:cNvCxnSpPr>
+          <p:nvPr/>
+        </p:nvCxnSpPr>
+        <p:spPr>
+          <a:xfrm>
+            <a:off x="15313179" y="1758790"/>
+            <a:ext cx="3407439" cy="0"/>
+          </a:xfrm>
+          <a:prstGeom prst="line">
+            <a:avLst/>
+          </a:prstGeom>
+          <a:ln>
+            <a:solidFill>
+              <a:schemeClr val="accent1"/>
+            </a:solidFill>
+          </a:ln>
+        </p:spPr>
+        <p:style>
+          <a:lnRef idx="2">
+            <a:schemeClr val="accent1"/>
+          </a:lnRef>
+          <a:fillRef idx="0">
+            <a:schemeClr val="accent1"/>
+          </a:fillRef>
+          <a:effectRef idx="1">
+            <a:schemeClr val="accent1"/>
+          </a:effectRef>
+          <a:fontRef idx="minor">
+            <a:schemeClr val="tx1"/>
+          </a:fontRef>
+        </p:style>
+      </p:cxnSp>
+      <p:cxnSp>
+        <p:nvCxnSpPr>
+          <p:cNvPr id="34" name="直線コネクタ 33">
+            <a:extLst>
+              <a:ext uri="{FF2B5EF4-FFF2-40B4-BE49-F238E27FC236}">
+                <a16:creationId xmlns:a16="http://schemas.microsoft.com/office/drawing/2014/main" id="{46AEC6DC-5592-AA57-7A76-B1E3ABD478E9}"/>
+              </a:ext>
+            </a:extLst>
+          </p:cNvPr>
+          <p:cNvCxnSpPr>
+            <a:cxnSpLocks/>
+          </p:cNvCxnSpPr>
+          <p:nvPr/>
+        </p:nvCxnSpPr>
+        <p:spPr>
+          <a:xfrm>
+            <a:off x="15313179" y="2190534"/>
+            <a:ext cx="3407439" cy="0"/>
+          </a:xfrm>
+          <a:prstGeom prst="line">
+            <a:avLst/>
+          </a:prstGeom>
+          <a:ln>
+            <a:solidFill>
+              <a:schemeClr val="accent2"/>
+            </a:solidFill>
+          </a:ln>
+        </p:spPr>
+        <p:style>
+          <a:lnRef idx="2">
+            <a:schemeClr val="accent1"/>
+          </a:lnRef>
+          <a:fillRef idx="0">
+            <a:schemeClr val="accent1"/>
+          </a:fillRef>
+          <a:effectRef idx="1">
+            <a:schemeClr val="accent1"/>
+          </a:effectRef>
+          <a:fontRef idx="minor">
+            <a:schemeClr val="tx1"/>
+          </a:fontRef>
+        </p:style>
+      </p:cxnSp>
+      <p:pic>
+        <p:nvPicPr>
+          <p:cNvPr id="6" name="Picture 5" descr="A person in a blue shirt&#10;&#10;Description automatically generated">
+            <a:extLst>
+              <a:ext uri="{FF2B5EF4-FFF2-40B4-BE49-F238E27FC236}">
+                <a16:creationId xmlns:a16="http://schemas.microsoft.com/office/drawing/2014/main" id="{96E6848B-F440-48F7-8D97-BFDC2E566925}"/>
+              </a:ext>
+            </a:extLst>
+          </p:cNvPr>
+          <p:cNvPicPr>
+            <a:picLocks noChangeAspect="1"/>
+          </p:cNvPicPr>
+          <p:nvPr/>
+        </p:nvPicPr>
+        <p:blipFill>
+          <a:blip r:embed="rId2">
+            <a:extLst>
+              <a:ext uri="{28A0092B-C50C-407E-A947-70E740481C1C}">
+                <a14:useLocalDpi xmlns:a14="http://schemas.microsoft.com/office/drawing/2010/main" val="0"/>
+              </a:ext>
+            </a:extLst>
+          </a:blip>
+          <a:stretch>
+            <a:fillRect/>
+          </a:stretch>
+        </p:blipFill>
+        <p:spPr>
+          <a:xfrm>
+            <a:off x="482877" y="554870"/>
+            <a:ext cx="1858541" cy="1858541"/>
+          </a:xfrm>
+          <a:prstGeom prst="rect">
+            <a:avLst/>
+          </a:prstGeom>
+        </p:spPr>
+      </p:pic>
+      <p:graphicFrame>
+        <p:nvGraphicFramePr>
+          <p:cNvPr id="8" name="Table 8">
+            <a:extLst>
+              <a:ext uri="{FF2B5EF4-FFF2-40B4-BE49-F238E27FC236}">
+                <a16:creationId xmlns:a16="http://schemas.microsoft.com/office/drawing/2014/main" id="{4583FA89-91F5-4999-A00D-689128341AE7}"/>
+              </a:ext>
+            </a:extLst>
+          </p:cNvPr>
+          <p:cNvGraphicFramePr>
+            <a:graphicFrameLocks noGrp="1"/>
+          </p:cNvGraphicFramePr>
+          <p:nvPr>
+            <p:extLst>
+              <p:ext uri="{D42A27DB-BD31-4B8C-83A1-F6EECF244321}">
+                <p14:modId xmlns:p14="http://schemas.microsoft.com/office/powerpoint/2010/main" val="3004169009"/>
+              </p:ext>
+            </p:extLst>
+          </p:nvPr>
+        </p:nvGraphicFramePr>
+        <p:xfrm>
+          <a:off x="2438399" y="564297"/>
+          <a:ext cx="9270724" cy="1858537"/>
+        </p:xfrm>
+        <a:graphic>
+          <a:graphicData uri="http://schemas.openxmlformats.org/drawingml/2006/table">
+            <a:tbl>
+              <a:tblPr bandRow="1" bandCol="1">
+                <a:tableStyleId>{F5AB1C69-6EDB-4FF4-983F-18BD219EF322}</a:tableStyleId>
+              </a:tblPr>
+              <a:tblGrid>
+                <a:gridCol w="9270724">
+                  <a:extLst>
+                    <a:ext uri="{9D8B030D-6E8A-4147-A177-3AD203B41FA5}">
+                      <a16:colId xmlns:a16="http://schemas.microsoft.com/office/drawing/2014/main" val="3736632186"/>
+                    </a:ext>
+                  </a:extLst>
+                </a:gridCol>
+              </a:tblGrid>
+              <a:tr h="514162">
+                <a:tc>
+                  <a:txBody>
+                    <a:bodyPr/>
+                    <a:lstStyle/>
+                    <a:p>
+                      <a:r>
+                        <a:rPr lang="en-PH" dirty="0"/>
+                        <a:t>Name: Lans Jeffrey L. Galos</a:t>
+                      </a:r>
+                    </a:p>
+                  </a:txBody>
+                  <a:tcPr/>
+                </a:tc>
+                <a:extLst>
+                  <a:ext uri="{0D108BD9-81ED-4DB2-BD59-A6C34878D82A}">
+                    <a16:rowId xmlns:a16="http://schemas.microsoft.com/office/drawing/2014/main" val="2496222673"/>
+                  </a:ext>
+                </a:extLst>
+              </a:tr>
+              <a:tr h="448125">
+                <a:tc>
+                  <a:txBody>
+                    <a:bodyPr/>
+                    <a:lstStyle/>
+                    <a:p>
+                      <a:r>
+                        <a:rPr lang="en-PH" dirty="0"/>
+                        <a:t>Position: Associate Technician</a:t>
+                      </a:r>
+                    </a:p>
+                  </a:txBody>
+                  <a:tcPr/>
+                </a:tc>
+                <a:extLst>
+                  <a:ext uri="{0D108BD9-81ED-4DB2-BD59-A6C34878D82A}">
+                    <a16:rowId xmlns:a16="http://schemas.microsoft.com/office/drawing/2014/main" val="942626656"/>
+                  </a:ext>
+                </a:extLst>
+              </a:tr>
+              <a:tr h="448125">
+                <a:tc>
+                  <a:txBody>
+                    <a:bodyPr/>
+                    <a:lstStyle/>
+                    <a:p>
+                      <a:endParaRPr lang="en-PH" dirty="0"/>
+                    </a:p>
+                  </a:txBody>
+                  <a:tcPr/>
+                </a:tc>
+                <a:extLst>
+                  <a:ext uri="{0D108BD9-81ED-4DB2-BD59-A6C34878D82A}">
+                    <a16:rowId xmlns:a16="http://schemas.microsoft.com/office/drawing/2014/main" val="3015441625"/>
+                  </a:ext>
+                </a:extLst>
+              </a:tr>
+              <a:tr h="448125">
+                <a:tc>
+                  <a:txBody>
+                    <a:bodyPr/>
+                    <a:lstStyle/>
+                    <a:p>
+                      <a:endParaRPr lang="en-PH" dirty="0"/>
+                    </a:p>
+                  </a:txBody>
+                  <a:tcPr/>
+                </a:tc>
+                <a:extLst>
+                  <a:ext uri="{0D108BD9-81ED-4DB2-BD59-A6C34878D82A}">
+                    <a16:rowId xmlns:a16="http://schemas.microsoft.com/office/drawing/2014/main" val="2269151385"/>
+                  </a:ext>
+                </a:extLst>
+              </a:tr>
+            </a:tbl>
+          </a:graphicData>
+        </a:graphic>
+      </p:graphicFrame>
+    </p:spTree>
+    <p:extLst>
+      <p:ext uri="{BB962C8B-B14F-4D97-AF65-F5344CB8AC3E}">
+        <p14:creationId xmlns:p14="http://schemas.microsoft.com/office/powerpoint/2010/main" val="3451976003"/>
+      </p:ext>
+    </p:extLst>
+  </p:cSld>
+  <p:clrMapOvr>
+    <a:masterClrMapping/>
+  </p:clrMapOvr>
+</p:sld>
+</file>
+
+<file path=ppt/slides/slide3.xml><?xml version="1.0" encoding="utf-8"?>
 <p:sld xmlns:a="http://schemas.openxmlformats.org/drawingml/2006/main" xmlns:r="http://schemas.openxmlformats.org/officeDocument/2006/relationships" xmlns:p="http://schemas.openxmlformats.org/presentationml/2006/main">
   <p:cSld>
     <p:spTree>
@@ -19533,7 +19947,7 @@
             <a:fld id="{91DAB662-2DEF-4FCA-85D7-1FA44B0FCDE8}" type="slidenum">
               <a:rPr lang="en-US" smtClean="0"/>
               <a:pPr/>
-              <a:t>2</a:t>
+              <a:t>3</a:t>
             </a:fld>
             <a:endParaRPr lang="en-US" dirty="0"/>
           </a:p>
@@ -19594,7 +20008,7 @@
           <a:p>
             <a:r>
               <a:rPr kumimoji="1" lang="en-PH" altLang="ja-JP" sz="3200" dirty="0"/>
-              <a:t>T130 Achievements</a:t>
+              <a:t>T130 Target</a:t>
             </a:r>
           </a:p>
         </p:txBody>
@@ -19747,7 +20161,7 @@
     </p:spTree>
     <p:extLst>
       <p:ext uri="{BB962C8B-B14F-4D97-AF65-F5344CB8AC3E}">
-        <p14:creationId xmlns:p14="http://schemas.microsoft.com/office/powerpoint/2010/main" val="4087126647"/>
+        <p14:creationId xmlns:p14="http://schemas.microsoft.com/office/powerpoint/2010/main" val="174218641"/>
       </p:ext>
     </p:extLst>
   </p:cSld>
@@ -19757,7 +20171,7 @@
 </p:sld>
 </file>
 
-<file path=ppt/slides/slide3.xml><?xml version="1.0" encoding="utf-8"?>
+<file path=ppt/slides/slide4.xml><?xml version="1.0" encoding="utf-8"?>
 <p:sld xmlns:a="http://schemas.openxmlformats.org/drawingml/2006/main" xmlns:r="http://schemas.openxmlformats.org/officeDocument/2006/relationships" xmlns:p="http://schemas.openxmlformats.org/presentationml/2006/main">
   <p:cSld>
     <p:spTree>
@@ -19833,7 +20247,7 @@
             <a:fld id="{91DAB662-2DEF-4FCA-85D7-1FA44B0FCDE8}" type="slidenum">
               <a:rPr lang="en-US" smtClean="0"/>
               <a:pPr/>
-              <a:t>3</a:t>
+              <a:t>4</a:t>
             </a:fld>
             <a:endParaRPr lang="en-US" dirty="0"/>
           </a:p>
@@ -20297,7 +20711,7 @@
     </p:spTree>
     <p:extLst>
       <p:ext uri="{BB962C8B-B14F-4D97-AF65-F5344CB8AC3E}">
-        <p14:creationId xmlns:p14="http://schemas.microsoft.com/office/powerpoint/2010/main" val="3451976003"/>
+        <p14:creationId xmlns:p14="http://schemas.microsoft.com/office/powerpoint/2010/main" val="1402868260"/>
       </p:ext>
     </p:extLst>
   </p:cSld>
@@ -20307,7 +20721,7 @@
 </p:sld>
 </file>
 
-<file path=ppt/slides/slide4.xml><?xml version="1.0" encoding="utf-8"?>
+<file path=ppt/slides/slide5.xml><?xml version="1.0" encoding="utf-8"?>
 <p:sld xmlns:a="http://schemas.openxmlformats.org/drawingml/2006/main" xmlns:r="http://schemas.openxmlformats.org/officeDocument/2006/relationships" xmlns:p="http://schemas.openxmlformats.org/presentationml/2006/main">
   <p:cSld>
     <p:spTree>
@@ -20383,7 +20797,7 @@
             <a:fld id="{91DAB662-2DEF-4FCA-85D7-1FA44B0FCDE8}" type="slidenum">
               <a:rPr lang="en-US" smtClean="0"/>
               <a:pPr/>
-              <a:t>4</a:t>
+              <a:t>5</a:t>
             </a:fld>
             <a:endParaRPr lang="en-US" dirty="0"/>
           </a:p>
@@ -20444,7 +20858,7 @@
           <a:p>
             <a:r>
               <a:rPr kumimoji="1" lang="en-PH" altLang="ja-JP" sz="3200" dirty="0"/>
-              <a:t>T130 Target</a:t>
+              <a:t>Dream</a:t>
             </a:r>
           </a:p>
         </p:txBody>
@@ -20597,7 +21011,7 @@
     </p:spTree>
     <p:extLst>
       <p:ext uri="{BB962C8B-B14F-4D97-AF65-F5344CB8AC3E}">
-        <p14:creationId xmlns:p14="http://schemas.microsoft.com/office/powerpoint/2010/main" val="174218641"/>
+        <p14:creationId xmlns:p14="http://schemas.microsoft.com/office/powerpoint/2010/main" val="2683799303"/>
       </p:ext>
     </p:extLst>
   </p:cSld>
@@ -20607,7 +21021,7 @@
 </p:sld>
 </file>
 
-<file path=ppt/slides/slide5.xml><?xml version="1.0" encoding="utf-8"?>
+<file path=ppt/slides/slide6.xml><?xml version="1.0" encoding="utf-8"?>
 <p:sld xmlns:a="http://schemas.openxmlformats.org/drawingml/2006/main" xmlns:r="http://schemas.openxmlformats.org/officeDocument/2006/relationships" xmlns:p="http://schemas.openxmlformats.org/presentationml/2006/main">
   <p:cSld>
     <p:spTree>
@@ -20683,7 +21097,7 @@
             <a:fld id="{91DAB662-2DEF-4FCA-85D7-1FA44B0FCDE8}" type="slidenum">
               <a:rPr lang="en-US" smtClean="0"/>
               <a:pPr/>
-              <a:t>5</a:t>
+              <a:t>6</a:t>
             </a:fld>
             <a:endParaRPr lang="en-US" dirty="0"/>
           </a:p>
@@ -21147,307 +21561,7 @@
     </p:spTree>
     <p:extLst>
       <p:ext uri="{BB962C8B-B14F-4D97-AF65-F5344CB8AC3E}">
-        <p14:creationId xmlns:p14="http://schemas.microsoft.com/office/powerpoint/2010/main" val="1402868260"/>
-      </p:ext>
-    </p:extLst>
-  </p:cSld>
-  <p:clrMapOvr>
-    <a:masterClrMapping/>
-  </p:clrMapOvr>
-</p:sld>
-</file>
-
-<file path=ppt/slides/slide6.xml><?xml version="1.0" encoding="utf-8"?>
-<p:sld xmlns:a="http://schemas.openxmlformats.org/drawingml/2006/main" xmlns:r="http://schemas.openxmlformats.org/officeDocument/2006/relationships" xmlns:p="http://schemas.openxmlformats.org/presentationml/2006/main">
-  <p:cSld>
-    <p:spTree>
-      <p:nvGrpSpPr>
-        <p:cNvPr id="1" name="">
-          <a:extLst>
-            <a:ext uri="{FF2B5EF4-FFF2-40B4-BE49-F238E27FC236}">
-              <a16:creationId xmlns:a16="http://schemas.microsoft.com/office/drawing/2014/main" id="{54BE1D7C-EA4D-6F55-E421-9E721C658344}"/>
-            </a:ext>
-          </a:extLst>
-        </p:cNvPr>
-        <p:cNvGrpSpPr/>
-        <p:nvPr/>
-      </p:nvGrpSpPr>
-      <p:grpSpPr>
-        <a:xfrm>
-          <a:off x="0" y="0"/>
-          <a:ext cx="0" cy="0"/>
-          <a:chOff x="0" y="0"/>
-          <a:chExt cx="0" cy="0"/>
-        </a:xfrm>
-      </p:grpSpPr>
-      <p:sp>
-        <p:nvSpPr>
-          <p:cNvPr id="2" name="Footer Placeholder 1">
-            <a:extLst>
-              <a:ext uri="{FF2B5EF4-FFF2-40B4-BE49-F238E27FC236}">
-                <a16:creationId xmlns:a16="http://schemas.microsoft.com/office/drawing/2014/main" id="{D960C33F-68B3-9812-9A8C-1FC2A608075F}"/>
-              </a:ext>
-            </a:extLst>
-          </p:cNvPr>
-          <p:cNvSpPr>
-            <a:spLocks noGrp="1"/>
-          </p:cNvSpPr>
-          <p:nvPr>
-            <p:ph type="ftr" sz="quarter" idx="16"/>
-          </p:nvPr>
-        </p:nvSpPr>
-        <p:spPr/>
-        <p:txBody>
-          <a:bodyPr/>
-          <a:lstStyle/>
-          <a:p>
-            <a:r>
-              <a:rPr lang="en-US"/>
-              <a:t>©︎ TDK Corporation 2025 | Department | Document title | Confidential</a:t>
-            </a:r>
-            <a:endParaRPr lang="en-US" dirty="0"/>
-          </a:p>
-        </p:txBody>
-      </p:sp>
-      <p:sp>
-        <p:nvSpPr>
-          <p:cNvPr id="3" name="Slide Number Placeholder 2">
-            <a:extLst>
-              <a:ext uri="{FF2B5EF4-FFF2-40B4-BE49-F238E27FC236}">
-                <a16:creationId xmlns:a16="http://schemas.microsoft.com/office/drawing/2014/main" id="{925147A8-DF1D-1FFC-869C-086536084D6D}"/>
-              </a:ext>
-            </a:extLst>
-          </p:cNvPr>
-          <p:cNvSpPr>
-            <a:spLocks noGrp="1"/>
-          </p:cNvSpPr>
-          <p:nvPr>
-            <p:ph type="sldNum" sz="quarter" idx="17"/>
-          </p:nvPr>
-        </p:nvSpPr>
-        <p:spPr/>
-        <p:txBody>
-          <a:bodyPr/>
-          <a:lstStyle/>
-          <a:p>
-            <a:fld id="{91DAB662-2DEF-4FCA-85D7-1FA44B0FCDE8}" type="slidenum">
-              <a:rPr lang="en-US" smtClean="0"/>
-              <a:pPr/>
-              <a:t>6</a:t>
-            </a:fld>
-            <a:endParaRPr lang="en-US" dirty="0"/>
-          </a:p>
-        </p:txBody>
-      </p:sp>
-      <p:sp>
-        <p:nvSpPr>
-          <p:cNvPr id="5" name="テキスト プレースホルダー 4">
-            <a:extLst>
-              <a:ext uri="{FF2B5EF4-FFF2-40B4-BE49-F238E27FC236}">
-                <a16:creationId xmlns:a16="http://schemas.microsoft.com/office/drawing/2014/main" id="{6C2FA0BE-0E11-E768-C656-DA4D5D0F38B3}"/>
-              </a:ext>
-            </a:extLst>
-          </p:cNvPr>
-          <p:cNvSpPr>
-            <a:spLocks noGrp="1"/>
-          </p:cNvSpPr>
-          <p:nvPr>
-            <p:ph type="body" sz="quarter" idx="14"/>
-          </p:nvPr>
-        </p:nvSpPr>
-        <p:spPr/>
-        <p:txBody>
-          <a:bodyPr/>
-          <a:lstStyle/>
-          <a:p>
-            <a:endParaRPr lang="en-US"/>
-          </a:p>
-        </p:txBody>
-      </p:sp>
-      <p:sp>
-        <p:nvSpPr>
-          <p:cNvPr id="21" name="TextBox 20">
-            <a:extLst>
-              <a:ext uri="{FF2B5EF4-FFF2-40B4-BE49-F238E27FC236}">
-                <a16:creationId xmlns:a16="http://schemas.microsoft.com/office/drawing/2014/main" id="{4E401F9B-EE9E-6838-0F6D-AE345C167287}"/>
-              </a:ext>
-            </a:extLst>
-          </p:cNvPr>
-          <p:cNvSpPr txBox="1"/>
-          <p:nvPr/>
-        </p:nvSpPr>
-        <p:spPr>
-          <a:xfrm>
-            <a:off x="497046" y="2277421"/>
-            <a:ext cx="10895203" cy="584775"/>
-          </a:xfrm>
-          <a:prstGeom prst="rect">
-            <a:avLst/>
-          </a:prstGeom>
-          <a:noFill/>
-        </p:spPr>
-        <p:txBody>
-          <a:bodyPr wrap="square">
-            <a:spAutoFit/>
-          </a:bodyPr>
-          <a:lstStyle/>
-          <a:p>
-            <a:r>
-              <a:rPr kumimoji="1" lang="en-PH" altLang="ja-JP" sz="3200" dirty="0"/>
-              <a:t>Dream</a:t>
-            </a:r>
-          </a:p>
-        </p:txBody>
-      </p:sp>
-      <p:sp>
-        <p:nvSpPr>
-          <p:cNvPr id="23" name="TextBox 22">
-            <a:extLst>
-              <a:ext uri="{FF2B5EF4-FFF2-40B4-BE49-F238E27FC236}">
-                <a16:creationId xmlns:a16="http://schemas.microsoft.com/office/drawing/2014/main" id="{57BF86A8-D641-2153-DE37-5146076CD1D0}"/>
-              </a:ext>
-            </a:extLst>
-          </p:cNvPr>
-          <p:cNvSpPr txBox="1"/>
-          <p:nvPr/>
-        </p:nvSpPr>
-        <p:spPr>
-          <a:xfrm>
-            <a:off x="8636319" y="4426936"/>
-            <a:ext cx="3555681" cy="1754326"/>
-          </a:xfrm>
-          <a:prstGeom prst="rect">
-            <a:avLst/>
-          </a:prstGeom>
-          <a:noFill/>
-        </p:spPr>
-        <p:txBody>
-          <a:bodyPr wrap="square">
-            <a:spAutoFit/>
-          </a:bodyPr>
-          <a:lstStyle/>
-          <a:p>
-            <a:pPr>
-              <a:tabLst>
-                <a:tab pos="3472080" algn="l"/>
-                <a:tab pos="4040784" algn="l"/>
-                <a:tab pos="4789077" algn="l"/>
-              </a:tabLst>
-            </a:pPr>
-            <a:r>
-              <a:rPr lang="en-US" altLang="de-DE" b="1" kern="0" dirty="0">
-                <a:solidFill>
-                  <a:schemeClr val="tx1"/>
-                </a:solidFill>
-                <a:cs typeface="Arial" charset="0"/>
-              </a:rPr>
-              <a:t>TDK Philippines Corporation</a:t>
-            </a:r>
-          </a:p>
-          <a:p>
-            <a:pPr>
-              <a:tabLst>
-                <a:tab pos="3472080" algn="l"/>
-                <a:tab pos="4040784" algn="l"/>
-                <a:tab pos="4789077" algn="l"/>
-              </a:tabLst>
-            </a:pPr>
-            <a:r>
-              <a:rPr lang="en-US" altLang="de-DE" kern="0" dirty="0">
-                <a:solidFill>
-                  <a:schemeClr val="tx1"/>
-                </a:solidFill>
-              </a:rPr>
-              <a:t>A TDK Group Company</a:t>
-            </a:r>
-          </a:p>
-          <a:p>
-            <a:pPr>
-              <a:tabLst>
-                <a:tab pos="3472080" algn="l"/>
-                <a:tab pos="4040784" algn="l"/>
-                <a:tab pos="4789077" algn="l"/>
-              </a:tabLst>
-            </a:pPr>
-            <a:r>
-              <a:rPr lang="en-US" altLang="de-DE" kern="0" dirty="0">
-                <a:solidFill>
-                  <a:schemeClr val="tx1"/>
-                </a:solidFill>
-              </a:rPr>
-              <a:t>Laguna, Philippines</a:t>
-            </a:r>
-          </a:p>
-          <a:p>
-            <a:pPr>
-              <a:tabLst>
-                <a:tab pos="3472080" algn="l"/>
-                <a:tab pos="4040784" algn="l"/>
-                <a:tab pos="4789077" algn="l"/>
-              </a:tabLst>
-            </a:pPr>
-            <a:r>
-              <a:rPr lang="en-US" altLang="de-DE" kern="0" dirty="0">
-                <a:solidFill>
-                  <a:schemeClr val="tx1"/>
-                </a:solidFill>
-              </a:rPr>
-              <a:t>(BMS) DEVELOPMENT</a:t>
-            </a:r>
-          </a:p>
-          <a:p>
-            <a:pPr>
-              <a:tabLst>
-                <a:tab pos="3472080" algn="l"/>
-                <a:tab pos="4040784" algn="l"/>
-                <a:tab pos="4789077" algn="l"/>
-              </a:tabLst>
-            </a:pPr>
-            <a:r>
-              <a:rPr lang="en-US" altLang="de-DE" sz="1800" kern="0" dirty="0"/>
-              <a:t>September </a:t>
-            </a:r>
-            <a:r>
-              <a:rPr lang="en-US" altLang="de-DE" sz="1800" kern="0" dirty="0">
-                <a:solidFill>
-                  <a:schemeClr val="tx1"/>
-                </a:solidFill>
-              </a:rPr>
-              <a:t>2025</a:t>
-            </a:r>
-          </a:p>
-          <a:p>
-            <a:pPr>
-              <a:tabLst>
-                <a:tab pos="3472080" algn="l"/>
-                <a:tab pos="4040784" algn="l"/>
-                <a:tab pos="4789077" algn="l"/>
-              </a:tabLst>
-            </a:pPr>
-            <a:r>
-              <a:rPr lang="en-US" altLang="de-DE" kern="0" dirty="0" err="1"/>
-              <a:t>Lans</a:t>
-            </a:r>
-            <a:r>
-              <a:rPr lang="en-US" altLang="de-DE" kern="0" dirty="0"/>
-              <a:t> Jeffrey </a:t>
-            </a:r>
-            <a:r>
-              <a:rPr lang="en-US" altLang="de-DE" kern="0" dirty="0" err="1"/>
-              <a:t>Galos</a:t>
-            </a:r>
-            <a:endParaRPr lang="en-US" altLang="de-DE" kern="0" dirty="0">
-              <a:solidFill>
-                <a:schemeClr val="tx1"/>
-              </a:solidFill>
-            </a:endParaRPr>
-          </a:p>
-        </p:txBody>
-      </p:sp>
-    </p:spTree>
-    <p:extLst>
-      <p:ext uri="{BB962C8B-B14F-4D97-AF65-F5344CB8AC3E}">
-        <p14:creationId xmlns:p14="http://schemas.microsoft.com/office/powerpoint/2010/main" val="2683799303"/>
+        <p14:creationId xmlns:p14="http://schemas.microsoft.com/office/powerpoint/2010/main" val="2342568302"/>
       </p:ext>
     </p:extLst>
   </p:cSld>
@@ -21458,556 +21572,6 @@
 </file>
 
 <file path=ppt/slides/slide7.xml><?xml version="1.0" encoding="utf-8"?>
-<p:sld xmlns:a="http://schemas.openxmlformats.org/drawingml/2006/main" xmlns:r="http://schemas.openxmlformats.org/officeDocument/2006/relationships" xmlns:p="http://schemas.openxmlformats.org/presentationml/2006/main">
-  <p:cSld>
-    <p:spTree>
-      <p:nvGrpSpPr>
-        <p:cNvPr id="1" name="">
-          <a:extLst>
-            <a:ext uri="{FF2B5EF4-FFF2-40B4-BE49-F238E27FC236}">
-              <a16:creationId xmlns:a16="http://schemas.microsoft.com/office/drawing/2014/main" id="{B4454F6A-E846-A0EF-455C-8C8624F6B8F6}"/>
-            </a:ext>
-          </a:extLst>
-        </p:cNvPr>
-        <p:cNvGrpSpPr/>
-        <p:nvPr/>
-      </p:nvGrpSpPr>
-      <p:grpSpPr>
-        <a:xfrm>
-          <a:off x="0" y="0"/>
-          <a:ext cx="0" cy="0"/>
-          <a:chOff x="0" y="0"/>
-          <a:chExt cx="0" cy="0"/>
-        </a:xfrm>
-      </p:grpSpPr>
-      <p:sp>
-        <p:nvSpPr>
-          <p:cNvPr id="2" name="Footer Placeholder 1">
-            <a:extLst>
-              <a:ext uri="{FF2B5EF4-FFF2-40B4-BE49-F238E27FC236}">
-                <a16:creationId xmlns:a16="http://schemas.microsoft.com/office/drawing/2014/main" id="{B92D1BA2-9B6E-80A0-3C75-D9A609C206D8}"/>
-              </a:ext>
-            </a:extLst>
-          </p:cNvPr>
-          <p:cNvSpPr>
-            <a:spLocks noGrp="1"/>
-          </p:cNvSpPr>
-          <p:nvPr>
-            <p:ph type="ftr" sz="quarter" idx="16"/>
-          </p:nvPr>
-        </p:nvSpPr>
-        <p:spPr/>
-        <p:txBody>
-          <a:bodyPr/>
-          <a:lstStyle/>
-          <a:p>
-            <a:r>
-              <a:rPr lang="en-US"/>
-              <a:t>©︎ TDK Corporation 2025 | Department | Document title | Confidential</a:t>
-            </a:r>
-            <a:endParaRPr lang="en-US" dirty="0"/>
-          </a:p>
-        </p:txBody>
-      </p:sp>
-      <p:sp>
-        <p:nvSpPr>
-          <p:cNvPr id="3" name="Slide Number Placeholder 2">
-            <a:extLst>
-              <a:ext uri="{FF2B5EF4-FFF2-40B4-BE49-F238E27FC236}">
-                <a16:creationId xmlns:a16="http://schemas.microsoft.com/office/drawing/2014/main" id="{58BED9AA-04D9-9FAF-4481-7B22819C5872}"/>
-              </a:ext>
-            </a:extLst>
-          </p:cNvPr>
-          <p:cNvSpPr>
-            <a:spLocks noGrp="1"/>
-          </p:cNvSpPr>
-          <p:nvPr>
-            <p:ph type="sldNum" sz="quarter" idx="17"/>
-          </p:nvPr>
-        </p:nvSpPr>
-        <p:spPr/>
-        <p:txBody>
-          <a:bodyPr/>
-          <a:lstStyle/>
-          <a:p>
-            <a:fld id="{91DAB662-2DEF-4FCA-85D7-1FA44B0FCDE8}" type="slidenum">
-              <a:rPr lang="en-US" smtClean="0"/>
-              <a:pPr/>
-              <a:t>7</a:t>
-            </a:fld>
-            <a:endParaRPr lang="en-US" dirty="0"/>
-          </a:p>
-        </p:txBody>
-      </p:sp>
-      <p:sp>
-        <p:nvSpPr>
-          <p:cNvPr id="5" name="テキスト プレースホルダー 4">
-            <a:extLst>
-              <a:ext uri="{FF2B5EF4-FFF2-40B4-BE49-F238E27FC236}">
-                <a16:creationId xmlns:a16="http://schemas.microsoft.com/office/drawing/2014/main" id="{ED5DAD44-863E-8F86-F5EC-CB1F4FDD4312}"/>
-              </a:ext>
-            </a:extLst>
-          </p:cNvPr>
-          <p:cNvSpPr>
-            <a:spLocks noGrp="1"/>
-          </p:cNvSpPr>
-          <p:nvPr>
-            <p:ph type="body" sz="quarter" idx="14"/>
-          </p:nvPr>
-        </p:nvSpPr>
-        <p:spPr/>
-        <p:txBody>
-          <a:bodyPr/>
-          <a:lstStyle/>
-          <a:p>
-            <a:endParaRPr lang="en-US"/>
-          </a:p>
-        </p:txBody>
-      </p:sp>
-      <p:cxnSp>
-        <p:nvCxnSpPr>
-          <p:cNvPr id="32" name="直線コネクタ 31">
-            <a:extLst>
-              <a:ext uri="{FF2B5EF4-FFF2-40B4-BE49-F238E27FC236}">
-                <a16:creationId xmlns:a16="http://schemas.microsoft.com/office/drawing/2014/main" id="{0CA045CA-A667-9FD5-E4FB-F0E0D9F310FA}"/>
-              </a:ext>
-            </a:extLst>
-          </p:cNvPr>
-          <p:cNvCxnSpPr>
-            <a:cxnSpLocks/>
-          </p:cNvCxnSpPr>
-          <p:nvPr/>
-        </p:nvCxnSpPr>
-        <p:spPr>
-          <a:xfrm>
-            <a:off x="15313179" y="1333302"/>
-            <a:ext cx="3407439" cy="0"/>
-          </a:xfrm>
-          <a:prstGeom prst="line">
-            <a:avLst/>
-          </a:prstGeom>
-          <a:ln>
-            <a:solidFill>
-              <a:schemeClr val="tx1"/>
-            </a:solidFill>
-          </a:ln>
-        </p:spPr>
-        <p:style>
-          <a:lnRef idx="2">
-            <a:schemeClr val="accent1"/>
-          </a:lnRef>
-          <a:fillRef idx="0">
-            <a:schemeClr val="accent1"/>
-          </a:fillRef>
-          <a:effectRef idx="1">
-            <a:schemeClr val="accent1"/>
-          </a:effectRef>
-          <a:fontRef idx="minor">
-            <a:schemeClr val="tx1"/>
-          </a:fontRef>
-        </p:style>
-      </p:cxnSp>
-      <p:cxnSp>
-        <p:nvCxnSpPr>
-          <p:cNvPr id="33" name="直線コネクタ 32">
-            <a:extLst>
-              <a:ext uri="{FF2B5EF4-FFF2-40B4-BE49-F238E27FC236}">
-                <a16:creationId xmlns:a16="http://schemas.microsoft.com/office/drawing/2014/main" id="{2B857F82-99A2-C045-9C3B-846195A5BDC7}"/>
-              </a:ext>
-            </a:extLst>
-          </p:cNvPr>
-          <p:cNvCxnSpPr>
-            <a:cxnSpLocks/>
-          </p:cNvCxnSpPr>
-          <p:nvPr/>
-        </p:nvCxnSpPr>
-        <p:spPr>
-          <a:xfrm>
-            <a:off x="15313179" y="1758790"/>
-            <a:ext cx="3407439" cy="0"/>
-          </a:xfrm>
-          <a:prstGeom prst="line">
-            <a:avLst/>
-          </a:prstGeom>
-          <a:ln>
-            <a:solidFill>
-              <a:schemeClr val="accent1"/>
-            </a:solidFill>
-          </a:ln>
-        </p:spPr>
-        <p:style>
-          <a:lnRef idx="2">
-            <a:schemeClr val="accent1"/>
-          </a:lnRef>
-          <a:fillRef idx="0">
-            <a:schemeClr val="accent1"/>
-          </a:fillRef>
-          <a:effectRef idx="1">
-            <a:schemeClr val="accent1"/>
-          </a:effectRef>
-          <a:fontRef idx="minor">
-            <a:schemeClr val="tx1"/>
-          </a:fontRef>
-        </p:style>
-      </p:cxnSp>
-      <p:cxnSp>
-        <p:nvCxnSpPr>
-          <p:cNvPr id="34" name="直線コネクタ 33">
-            <a:extLst>
-              <a:ext uri="{FF2B5EF4-FFF2-40B4-BE49-F238E27FC236}">
-                <a16:creationId xmlns:a16="http://schemas.microsoft.com/office/drawing/2014/main" id="{46AEC6DC-5592-AA57-7A76-B1E3ABD478E9}"/>
-              </a:ext>
-            </a:extLst>
-          </p:cNvPr>
-          <p:cNvCxnSpPr>
-            <a:cxnSpLocks/>
-          </p:cNvCxnSpPr>
-          <p:nvPr/>
-        </p:nvCxnSpPr>
-        <p:spPr>
-          <a:xfrm>
-            <a:off x="15313179" y="2190534"/>
-            <a:ext cx="3407439" cy="0"/>
-          </a:xfrm>
-          <a:prstGeom prst="line">
-            <a:avLst/>
-          </a:prstGeom>
-          <a:ln>
-            <a:solidFill>
-              <a:schemeClr val="accent2"/>
-            </a:solidFill>
-          </a:ln>
-        </p:spPr>
-        <p:style>
-          <a:lnRef idx="2">
-            <a:schemeClr val="accent1"/>
-          </a:lnRef>
-          <a:fillRef idx="0">
-            <a:schemeClr val="accent1"/>
-          </a:fillRef>
-          <a:effectRef idx="1">
-            <a:schemeClr val="accent1"/>
-          </a:effectRef>
-          <a:fontRef idx="minor">
-            <a:schemeClr val="tx1"/>
-          </a:fontRef>
-        </p:style>
-      </p:cxnSp>
-      <p:sp>
-        <p:nvSpPr>
-          <p:cNvPr id="73" name="TextBox 72">
-            <a:extLst>
-              <a:ext uri="{FF2B5EF4-FFF2-40B4-BE49-F238E27FC236}">
-                <a16:creationId xmlns:a16="http://schemas.microsoft.com/office/drawing/2014/main" id="{3A32A362-E054-AAA4-DBB5-F6EF7F9AD0C9}"/>
-              </a:ext>
-            </a:extLst>
-          </p:cNvPr>
-          <p:cNvSpPr txBox="1"/>
-          <p:nvPr/>
-        </p:nvSpPr>
-        <p:spPr>
-          <a:xfrm>
-            <a:off x="587375" y="933192"/>
-            <a:ext cx="5508625" cy="400110"/>
-          </a:xfrm>
-          <a:prstGeom prst="rect">
-            <a:avLst/>
-          </a:prstGeom>
-          <a:noFill/>
-        </p:spPr>
-        <p:txBody>
-          <a:bodyPr wrap="square" rtlCol="0">
-            <a:spAutoFit/>
-          </a:bodyPr>
-          <a:lstStyle/>
-          <a:p>
-            <a:r>
-              <a:rPr lang="en-PH" sz="2000" u="sng" dirty="0"/>
-              <a:t>Exhaust Fan Holder 3D Model Improvement:</a:t>
-            </a:r>
-          </a:p>
-        </p:txBody>
-      </p:sp>
-      <p:sp>
-        <p:nvSpPr>
-          <p:cNvPr id="85" name="角丸四角形 22">
-            <a:extLst>
-              <a:ext uri="{FF2B5EF4-FFF2-40B4-BE49-F238E27FC236}">
-                <a16:creationId xmlns:a16="http://schemas.microsoft.com/office/drawing/2014/main" id="{E6302494-BE9A-E438-990E-339A5AB110E8}"/>
-              </a:ext>
-            </a:extLst>
-          </p:cNvPr>
-          <p:cNvSpPr/>
-          <p:nvPr/>
-        </p:nvSpPr>
-        <p:spPr>
-          <a:xfrm>
-            <a:off x="385895" y="388557"/>
-            <a:ext cx="7129055" cy="400111"/>
-          </a:xfrm>
-          <a:prstGeom prst="roundRect">
-            <a:avLst>
-              <a:gd name="adj" fmla="val 16425"/>
-            </a:avLst>
-          </a:prstGeom>
-          <a:noFill/>
-          <a:ln>
-            <a:noFill/>
-          </a:ln>
-        </p:spPr>
-        <p:style>
-          <a:lnRef idx="2">
-            <a:schemeClr val="accent1">
-              <a:shade val="15000"/>
-            </a:schemeClr>
-          </a:lnRef>
-          <a:fillRef idx="1">
-            <a:schemeClr val="accent1"/>
-          </a:fillRef>
-          <a:effectRef idx="0">
-            <a:schemeClr val="accent1"/>
-          </a:effectRef>
-          <a:fontRef idx="minor">
-            <a:schemeClr val="lt1"/>
-          </a:fontRef>
-        </p:style>
-        <p:txBody>
-          <a:bodyPr rtlCol="0" anchor="ctr"/>
-          <a:lstStyle/>
-          <a:p>
-            <a:r>
-              <a:rPr lang="en-PH" sz="1800" b="1" dirty="0">
-                <a:solidFill>
-                  <a:schemeClr val="tx1"/>
-                </a:solidFill>
-                <a:latin typeface="+mn-lt"/>
-              </a:rPr>
-              <a:t>Other Activities</a:t>
-            </a:r>
-          </a:p>
-        </p:txBody>
-      </p:sp>
-      <p:sp>
-        <p:nvSpPr>
-          <p:cNvPr id="24" name="TextBox 23">
-            <a:extLst>
-              <a:ext uri="{FF2B5EF4-FFF2-40B4-BE49-F238E27FC236}">
-                <a16:creationId xmlns:a16="http://schemas.microsoft.com/office/drawing/2014/main" id="{94E73160-A6C9-408B-910E-04ADE3009698}"/>
-              </a:ext>
-            </a:extLst>
-          </p:cNvPr>
-          <p:cNvSpPr txBox="1"/>
-          <p:nvPr/>
-        </p:nvSpPr>
-        <p:spPr>
-          <a:xfrm>
-            <a:off x="725321" y="1351508"/>
-            <a:ext cx="11335050" cy="361637"/>
-          </a:xfrm>
-          <a:prstGeom prst="rect">
-            <a:avLst/>
-          </a:prstGeom>
-          <a:noFill/>
-        </p:spPr>
-        <p:txBody>
-          <a:bodyPr wrap="square" rtlCol="0">
-            <a:spAutoFit/>
-          </a:bodyPr>
-          <a:lstStyle/>
-          <a:p>
-            <a:endParaRPr lang="en-PH" sz="1750" dirty="0"/>
-          </a:p>
-        </p:txBody>
-      </p:sp>
-      <p:sp>
-        <p:nvSpPr>
-          <p:cNvPr id="14" name="TextBox 13">
-            <a:extLst>
-              <a:ext uri="{FF2B5EF4-FFF2-40B4-BE49-F238E27FC236}">
-                <a16:creationId xmlns:a16="http://schemas.microsoft.com/office/drawing/2014/main" id="{AEFFEEC6-A918-4ACD-A673-63C0FC225EF7}"/>
-              </a:ext>
-            </a:extLst>
-          </p:cNvPr>
-          <p:cNvSpPr txBox="1"/>
-          <p:nvPr/>
-        </p:nvSpPr>
-        <p:spPr>
-          <a:xfrm>
-            <a:off x="685868" y="4418398"/>
-            <a:ext cx="6749196" cy="630942"/>
-          </a:xfrm>
-          <a:prstGeom prst="rect">
-            <a:avLst/>
-          </a:prstGeom>
-          <a:noFill/>
-        </p:spPr>
-        <p:txBody>
-          <a:bodyPr wrap="square" rtlCol="0">
-            <a:spAutoFit/>
-          </a:bodyPr>
-          <a:lstStyle/>
-          <a:p>
-            <a:r>
-              <a:rPr lang="en-PH" sz="1750" dirty="0"/>
-              <a:t>Status: For review</a:t>
-            </a:r>
-          </a:p>
-          <a:p>
-            <a:r>
-              <a:rPr lang="en-PH" sz="1750" dirty="0"/>
-              <a:t>Result: Designed and Drawn the 3D Model</a:t>
-            </a:r>
-          </a:p>
-        </p:txBody>
-      </p:sp>
-      <p:sp>
-        <p:nvSpPr>
-          <p:cNvPr id="15" name="TextBox 14">
-            <a:extLst>
-              <a:ext uri="{FF2B5EF4-FFF2-40B4-BE49-F238E27FC236}">
-                <a16:creationId xmlns:a16="http://schemas.microsoft.com/office/drawing/2014/main" id="{CB089E15-9BCC-45F9-8255-1BC32DD3B18C}"/>
-              </a:ext>
-            </a:extLst>
-          </p:cNvPr>
-          <p:cNvSpPr txBox="1"/>
-          <p:nvPr/>
-        </p:nvSpPr>
-        <p:spPr>
-          <a:xfrm>
-            <a:off x="587374" y="3887477"/>
-            <a:ext cx="10618285" cy="400110"/>
-          </a:xfrm>
-          <a:prstGeom prst="rect">
-            <a:avLst/>
-          </a:prstGeom>
-          <a:noFill/>
-        </p:spPr>
-        <p:txBody>
-          <a:bodyPr wrap="square" rtlCol="0">
-            <a:spAutoFit/>
-          </a:bodyPr>
-          <a:lstStyle/>
-          <a:p>
-            <a:r>
-              <a:rPr lang="en-PH" sz="2000" u="sng" dirty="0"/>
-              <a:t>3D Model Trash Drawer for Semi Auto Coil Winding Machine:</a:t>
-            </a:r>
-          </a:p>
-        </p:txBody>
-      </p:sp>
-      <p:sp>
-        <p:nvSpPr>
-          <p:cNvPr id="17" name="TextBox 16">
-            <a:extLst>
-              <a:ext uri="{FF2B5EF4-FFF2-40B4-BE49-F238E27FC236}">
-                <a16:creationId xmlns:a16="http://schemas.microsoft.com/office/drawing/2014/main" id="{04D95E9F-6BEF-49A5-AA47-F15666F4A3C6}"/>
-              </a:ext>
-            </a:extLst>
-          </p:cNvPr>
-          <p:cNvSpPr txBox="1"/>
-          <p:nvPr/>
-        </p:nvSpPr>
-        <p:spPr>
-          <a:xfrm>
-            <a:off x="725321" y="1464953"/>
-            <a:ext cx="6749196" cy="630942"/>
-          </a:xfrm>
-          <a:prstGeom prst="rect">
-            <a:avLst/>
-          </a:prstGeom>
-          <a:noFill/>
-        </p:spPr>
-        <p:txBody>
-          <a:bodyPr wrap="square" rtlCol="0">
-            <a:spAutoFit/>
-          </a:bodyPr>
-          <a:lstStyle/>
-          <a:p>
-            <a:r>
-              <a:rPr lang="en-PH" sz="1750" dirty="0"/>
-              <a:t>Status: For review</a:t>
-            </a:r>
-          </a:p>
-          <a:p>
-            <a:r>
-              <a:rPr lang="en-PH" sz="1750" dirty="0"/>
-              <a:t>Result: Designed and Drawn the 3D Model</a:t>
-            </a:r>
-          </a:p>
-        </p:txBody>
-      </p:sp>
-      <p:pic>
-        <p:nvPicPr>
-          <p:cNvPr id="19" name="Picture 18">
-            <a:extLst>
-              <a:ext uri="{FF2B5EF4-FFF2-40B4-BE49-F238E27FC236}">
-                <a16:creationId xmlns:a16="http://schemas.microsoft.com/office/drawing/2014/main" id="{3C33F39A-E078-4214-A71A-0298B0047041}"/>
-              </a:ext>
-            </a:extLst>
-          </p:cNvPr>
-          <p:cNvPicPr>
-            <a:picLocks noChangeAspect="1"/>
-          </p:cNvPicPr>
-          <p:nvPr/>
-        </p:nvPicPr>
-        <p:blipFill>
-          <a:blip r:embed="rId2"/>
-          <a:stretch>
-            <a:fillRect/>
-          </a:stretch>
-        </p:blipFill>
-        <p:spPr>
-          <a:xfrm>
-            <a:off x="8720707" y="783293"/>
-            <a:ext cx="2342959" cy="1696625"/>
-          </a:xfrm>
-          <a:prstGeom prst="rect">
-            <a:avLst/>
-          </a:prstGeom>
-        </p:spPr>
-      </p:pic>
-      <p:pic>
-        <p:nvPicPr>
-          <p:cNvPr id="20" name="Picture 19">
-            <a:extLst>
-              <a:ext uri="{FF2B5EF4-FFF2-40B4-BE49-F238E27FC236}">
-                <a16:creationId xmlns:a16="http://schemas.microsoft.com/office/drawing/2014/main" id="{76FCE27D-C82B-4A24-9979-24CFD2E33C0B}"/>
-              </a:ext>
-            </a:extLst>
-          </p:cNvPr>
-          <p:cNvPicPr/>
-          <p:nvPr/>
-        </p:nvPicPr>
-        <p:blipFill>
-          <a:blip r:embed="rId3"/>
-          <a:stretch>
-            <a:fillRect/>
-          </a:stretch>
-        </p:blipFill>
-        <p:spPr>
-          <a:xfrm>
-            <a:off x="8977828" y="3579160"/>
-            <a:ext cx="2085838" cy="2495594"/>
-          </a:xfrm>
-          <a:prstGeom prst="rect">
-            <a:avLst/>
-          </a:prstGeom>
-        </p:spPr>
-      </p:pic>
-    </p:spTree>
-    <p:extLst>
-      <p:ext uri="{BB962C8B-B14F-4D97-AF65-F5344CB8AC3E}">
-        <p14:creationId xmlns:p14="http://schemas.microsoft.com/office/powerpoint/2010/main" val="2342568302"/>
-      </p:ext>
-    </p:extLst>
-  </p:cSld>
-  <p:clrMapOvr>
-    <a:masterClrMapping/>
-  </p:clrMapOvr>
-</p:sld>
-</file>
-
-<file path=ppt/slides/slide8.xml><?xml version="1.0" encoding="utf-8"?>
 <p:sld xmlns:a="http://schemas.openxmlformats.org/drawingml/2006/main" xmlns:r="http://schemas.openxmlformats.org/officeDocument/2006/relationships" xmlns:p="http://schemas.openxmlformats.org/presentationml/2006/main">
   <p:cSld>
     <p:spTree>
@@ -22893,28 +22457,6 @@
 </file>
 
 <file path=customXml/item1.xml><?xml version="1.0" encoding="utf-8"?>
-<p:properties xmlns:p="http://schemas.microsoft.com/office/2006/metadata/properties" xmlns:xsi="http://www.w3.org/2001/XMLSchema-instance" xmlns:pc="http://schemas.microsoft.com/office/infopath/2007/PartnerControls">
-  <documentManagement>
-    <lcf76f155ced4ddcb4097134ff3c332f xmlns="f15e880d-5684-4075-9d60-eac788d9045b">
-      <Terms xmlns="http://schemas.microsoft.com/office/infopath/2007/PartnerControls"/>
-    </lcf76f155ced4ddcb4097134ff3c332f>
-    <TaxCatchAll xmlns="a11a49d9-2a5c-450a-a84b-a693d3734f7a" xsi:nil="true"/>
-    <_x5099__x8003_ xmlns="f15e880d-5684-4075-9d60-eac788d9045b" xsi:nil="true"/>
-    <Update xmlns="f15e880d-5684-4075-9d60-eac788d9045b" xsi:nil="true"/>
-  </documentManagement>
-</p:properties>
-</file>
-
-<file path=customXml/item2.xml><?xml version="1.0" encoding="utf-8"?>
-<?mso-contentType ?>
-<FormTemplates xmlns="http://schemas.microsoft.com/sharepoint/v3/contenttype/forms">
-  <Display>DocumentLibraryForm</Display>
-  <Edit>DocumentLibraryForm</Edit>
-  <New>DocumentLibraryForm</New>
-</FormTemplates>
-</file>
-
-<file path=customXml/item3.xml><?xml version="1.0" encoding="utf-8"?>
 <ct:contentTypeSchema xmlns:ct="http://schemas.microsoft.com/office/2006/metadata/contentType" xmlns:ma="http://schemas.microsoft.com/office/2006/metadata/properties/metaAttributes" ct:_="" ma:_="" ma:contentTypeName="ドキュメント" ma:contentTypeID="0x010100F9E4F70D0B08D549B1A699C110D29A41" ma:contentTypeVersion="18" ma:contentTypeDescription="新しいドキュメントを作成します。" ma:contentTypeScope="" ma:versionID="d8ec990f8bb6d77561cf4e9913aa514a">
   <xsd:schema xmlns:xsd="http://www.w3.org/2001/XMLSchema" xmlns:xs="http://www.w3.org/2001/XMLSchema" xmlns:p="http://schemas.microsoft.com/office/2006/metadata/properties" xmlns:ns2="f15e880d-5684-4075-9d60-eac788d9045b" xmlns:ns3="a11a49d9-2a5c-450a-a84b-a693d3734f7a" targetNamespace="http://schemas.microsoft.com/office/2006/metadata/properties" ma:root="true" ma:fieldsID="19dbd490739628172e10ac5cfad25682" ns2:_="" ns3:_="">
     <xsd:import namespace="f15e880d-5684-4075-9d60-eac788d9045b"/>
@@ -23171,26 +22713,29 @@
 </ct:contentTypeSchema>
 </file>
 
-<file path=customXml/itemProps1.xml><?xml version="1.0" encoding="utf-8"?>
-<ds:datastoreItem xmlns:ds="http://schemas.openxmlformats.org/officeDocument/2006/customXml" ds:itemID="{848F345A-1244-4F9A-A029-D10E70810599}">
-  <ds:schemaRefs>
-    <ds:schemaRef ds:uri="http://schemas.microsoft.com/office/2006/metadata/properties"/>
-    <ds:schemaRef ds:uri="http://schemas.microsoft.com/office/infopath/2007/PartnerControls"/>
-    <ds:schemaRef ds:uri="f15e880d-5684-4075-9d60-eac788d9045b"/>
-    <ds:schemaRef ds:uri="a11a49d9-2a5c-450a-a84b-a693d3734f7a"/>
-  </ds:schemaRefs>
-</ds:datastoreItem>
+<file path=customXml/item2.xml><?xml version="1.0" encoding="utf-8"?>
+<?mso-contentType ?>
+<FormTemplates xmlns="http://schemas.microsoft.com/sharepoint/v3/contenttype/forms">
+  <Display>DocumentLibraryForm</Display>
+  <Edit>DocumentLibraryForm</Edit>
+  <New>DocumentLibraryForm</New>
+</FormTemplates>
 </file>
 
-<file path=customXml/itemProps2.xml><?xml version="1.0" encoding="utf-8"?>
-<ds:datastoreItem xmlns:ds="http://schemas.openxmlformats.org/officeDocument/2006/customXml" ds:itemID="{158C9F39-DF20-4B15-92D2-A6866F4A7367}">
-  <ds:schemaRefs>
-    <ds:schemaRef ds:uri="http://schemas.microsoft.com/sharepoint/v3/contenttype/forms"/>
-  </ds:schemaRefs>
-</ds:datastoreItem>
+<file path=customXml/item3.xml><?xml version="1.0" encoding="utf-8"?>
+<p:properties xmlns:p="http://schemas.microsoft.com/office/2006/metadata/properties" xmlns:xsi="http://www.w3.org/2001/XMLSchema-instance" xmlns:pc="http://schemas.microsoft.com/office/infopath/2007/PartnerControls">
+  <documentManagement>
+    <lcf76f155ced4ddcb4097134ff3c332f xmlns="f15e880d-5684-4075-9d60-eac788d9045b">
+      <Terms xmlns="http://schemas.microsoft.com/office/infopath/2007/PartnerControls"/>
+    </lcf76f155ced4ddcb4097134ff3c332f>
+    <TaxCatchAll xmlns="a11a49d9-2a5c-450a-a84b-a693d3734f7a" xsi:nil="true"/>
+    <_x5099__x8003_ xmlns="f15e880d-5684-4075-9d60-eac788d9045b" xsi:nil="true"/>
+    <Update xmlns="f15e880d-5684-4075-9d60-eac788d9045b" xsi:nil="true"/>
+  </documentManagement>
+</p:properties>
 </file>
 
-<file path=customXml/itemProps3.xml><?xml version="1.0" encoding="utf-8"?>
+<file path=customXml/itemProps1.xml><?xml version="1.0" encoding="utf-8"?>
 <ds:datastoreItem xmlns:ds="http://schemas.openxmlformats.org/officeDocument/2006/customXml" ds:itemID="{BE537FDC-8227-45A5-9474-117B0D2958F0}">
   <ds:schemaRefs>
     <ds:schemaRef ds:uri="http://schemas.microsoft.com/office/2006/metadata/contentType"/>
@@ -23209,6 +22754,25 @@
 </ds:datastoreItem>
 </file>
 
+<file path=customXml/itemProps2.xml><?xml version="1.0" encoding="utf-8"?>
+<ds:datastoreItem xmlns:ds="http://schemas.openxmlformats.org/officeDocument/2006/customXml" ds:itemID="{158C9F39-DF20-4B15-92D2-A6866F4A7367}">
+  <ds:schemaRefs>
+    <ds:schemaRef ds:uri="http://schemas.microsoft.com/sharepoint/v3/contenttype/forms"/>
+  </ds:schemaRefs>
+</ds:datastoreItem>
+</file>
+
+<file path=customXml/itemProps3.xml><?xml version="1.0" encoding="utf-8"?>
+<ds:datastoreItem xmlns:ds="http://schemas.openxmlformats.org/officeDocument/2006/customXml" ds:itemID="{848F345A-1244-4F9A-A029-D10E70810599}">
+  <ds:schemaRefs>
+    <ds:schemaRef ds:uri="http://schemas.microsoft.com/office/2006/metadata/properties"/>
+    <ds:schemaRef ds:uri="http://schemas.microsoft.com/office/infopath/2007/PartnerControls"/>
+    <ds:schemaRef ds:uri="f15e880d-5684-4075-9d60-eac788d9045b"/>
+    <ds:schemaRef ds:uri="a11a49d9-2a5c-450a-a84b-a693d3734f7a"/>
+  </ds:schemaRefs>
+</ds:datastoreItem>
+</file>
+
 <file path=docMetadata/LabelInfo.xml><?xml version="1.0" encoding="utf-8"?>
 <clbl:labelList xmlns:clbl="http://schemas.microsoft.com/office/2020/mipLabelMetadata">
   <clbl:label id="{8e19d756-792e-42a1-bcad-4cb9051ddd2d}" enabled="1" method="Standard" siteId="{41eb501a-f671-4ce0-a5bf-b64168c3705f}" removed="0"/>
